--- a/dist/초5/수학/자연수의계산/초5_수학_자연수의계산_02_약수와배수.pptx
+++ b/dist/초5/수학/자연수의계산/초5_수학_자연수의계산_02_약수와배수.pptx
@@ -121,13 +121,13 @@
   <p:extLst>
     <p:ext uri="{521415D9-36F7-43E2-AB2F-B90AF26B5E84}">
       <p14:sectionLst xmlns:p14="http://schemas.microsoft.com/office/powerpoint/2010/main">
-        <p14:section name="도입" id="{dd2ee4c1-29d3-0275-65af-14f456c842fc}">
+        <p14:section name="도입" id="{b81dcbe2-c8dc-d7ee-ddc3-a35bd2c9dfb2}">
           <p14:sldIdLst>
             <p14:sldId id="256"/>
             <p14:sldId id="257"/>
           </p14:sldIdLst>
         </p14:section>
-        <p14:section name="개념" id="{d2c2e4ff-7139-9d27-9961-e5f231c39829}">
+        <p14:section name="개념" id="{e6ea6b1d-a8bb-f51a-974b-d45065b34c11}">
           <p14:sldIdLst>
             <p14:sldId id="258"/>
             <p14:sldId id="259"/>
@@ -136,38 +136,38 @@
             <p14:sldId id="264"/>
           </p14:sldIdLst>
         </p14:section>
-        <p14:section name="연습" id="{a694e502-a17a-a9f5-190e-28cf689d692e}">
+        <p14:section name="연습" id="{88e53c8d-6f07-ffd2-b287-2ff8802fa570}">
           <p14:sldIdLst>
             <p14:sldId id="261"/>
             <p14:sldId id="263"/>
             <p14:sldId id="265"/>
           </p14:sldIdLst>
         </p14:section>
-        <p14:section name="개념" id="{484ff750-47d8-2050-8a17-b89f637e18b6}">
+        <p14:section name="개념" id="{7d3c7958-eeaa-3dba-1e16-7e8aa3b28a97}">
           <p14:sldIdLst/>
         </p14:section>
-        <p14:section name="연습" id="{cbfe3ad0-4d82-1701-44b7-058d291c681f}">
+        <p14:section name="연습" id="{1525e7ca-f961-1383-b3d9-c053a2389c33}">
           <p14:sldIdLst/>
         </p14:section>
-        <p14:section name="개념" id="{a4dcb339-4a49-ab92-c0cb-62651924659f}">
+        <p14:section name="개념" id="{d40bbe3f-09f5-6de8-3de4-138f16609a5a}">
           <p14:sldIdLst/>
         </p14:section>
-        <p14:section name="연습" id="{95c8e4be-bcc6-cd7a-e036-6f5d94f42cdf}">
+        <p14:section name="연습" id="{235afba8-b3f2-ff8e-3d82-2c407c443f44}">
           <p14:sldIdLst/>
         </p14:section>
-        <p14:section name="확인" id="{b70534ae-3cb9-92bf-10be-38d93bacdcd4}">
+        <p14:section name="확인" id="{47b4cd15-84ad-f947-1fc0-46424537e793}">
           <p14:sldIdLst>
             <p14:sldId id="266"/>
             <p14:sldId id="267"/>
             <p14:sldId id="268"/>
           </p14:sldIdLst>
         </p14:section>
-        <p14:section name="정리" id="{3dd6173a-ab5e-6d89-ad47-6961b6d58dd8}">
+        <p14:section name="정리" id="{d064b170-2698-f9e2-511e-7f6533e44a66}">
           <p14:sldIdLst>
             <p14:sldId id="269"/>
           </p14:sldIdLst>
         </p14:section>
-        <p14:section name="보충" id="{d1d90384-6f33-61a8-88f1-aca8df90faac}">
+        <p14:section name="보충" id="{2e825d07-a67f-4dbf-9408-cd2ddf7f9d15}">
           <p14:sldIdLst>
             <p14:sldId id="270"/>
           </p14:sldIdLst>
